--- a/all-letters-tanween/01-alif.pptx
+++ b/all-letters-tanween/01-alif.pptx
@@ -3973,7 +3973,7 @@
                 <a:ea typeface="Arial" pitchFamily="34" charset="-122"/>
                 <a:cs typeface="Arial" pitchFamily="34" charset="-120"/>
               </a:rPr>
-              <a:t>خ</a:t>
+              <a:t>د</a:t>
             </a:r>
             <a:endParaRPr lang="ar-SA" sz="9000" dirty="0"/>
           </a:p>
@@ -4012,7 +4012,7 @@
                 <a:ea typeface="Arial" pitchFamily="34" charset="-122"/>
                 <a:cs typeface="Arial" pitchFamily="34" charset="-120"/>
               </a:rPr>
-              <a:t>خًا</a:t>
+              <a:t>دًا</a:t>
             </a:r>
             <a:endParaRPr lang="ar-SA" sz="9000" dirty="0"/>
           </a:p>
@@ -4051,7 +4051,7 @@
                 <a:ea typeface="Arial" pitchFamily="34" charset="-122"/>
                 <a:cs typeface="Arial" pitchFamily="34" charset="-120"/>
               </a:rPr>
-              <a:t>أَخًا</a:t>
+              <a:t>أَدًا</a:t>
             </a:r>
             <a:endParaRPr lang="ar-SA" sz="9600" dirty="0"/>
           </a:p>
@@ -6742,7 +6742,7 @@
                 <a:ea typeface="Arial" pitchFamily="34" charset="-122"/>
                 <a:cs typeface="Arial" pitchFamily="34" charset="-120"/>
               </a:rPr>
-              <a:t>ب</a:t>
+              <a:t>ث</a:t>
             </a:r>
             <a:endParaRPr lang="ar-SA" sz="6600" dirty="0"/>
           </a:p>
@@ -6781,7 +6781,7 @@
                 <a:ea typeface="Arial" pitchFamily="34" charset="-122"/>
                 <a:cs typeface="Arial" pitchFamily="34" charset="-120"/>
               </a:rPr>
-              <a:t>بٍ</a:t>
+              <a:t>ثٍ</a:t>
             </a:r>
             <a:endParaRPr lang="ar-SA" sz="6600" dirty="0"/>
           </a:p>
@@ -6820,7 +6820,7 @@
                 <a:ea typeface="Arial" pitchFamily="34" charset="-122"/>
                 <a:cs typeface="Arial" pitchFamily="34" charset="-120"/>
               </a:rPr>
-              <a:t>تَأَبٍ</a:t>
+              <a:t>تَأَثٍ</a:t>
             </a:r>
             <a:endParaRPr lang="ar-SA" sz="7200" dirty="0"/>
           </a:p>
@@ -8236,7 +8236,7 @@
                 <a:ea typeface="Arial" pitchFamily="34" charset="-122"/>
                 <a:cs typeface="Arial" pitchFamily="34" charset="-120"/>
               </a:rPr>
-              <a:t>ب</a:t>
+              <a:t>ج</a:t>
             </a:r>
             <a:endParaRPr lang="ar-SA" sz="6600" dirty="0"/>
           </a:p>
@@ -8275,7 +8275,7 @@
                 <a:ea typeface="Arial" pitchFamily="34" charset="-122"/>
                 <a:cs typeface="Arial" pitchFamily="34" charset="-120"/>
               </a:rPr>
-              <a:t>بٌ</a:t>
+              <a:t>جٌ</a:t>
             </a:r>
             <a:endParaRPr lang="ar-SA" sz="6600" dirty="0"/>
           </a:p>
@@ -8314,7 +8314,7 @@
                 <a:ea typeface="Arial" pitchFamily="34" charset="-122"/>
                 <a:cs typeface="Arial" pitchFamily="34" charset="-120"/>
               </a:rPr>
-              <a:t>ثَأَبٌ</a:t>
+              <a:t>ثَأَجٌ</a:t>
             </a:r>
             <a:endParaRPr lang="ar-SA" sz="7200" dirty="0"/>
           </a:p>
@@ -9730,7 +9730,7 @@
                 <a:ea typeface="Arial" pitchFamily="34" charset="-122"/>
                 <a:cs typeface="Arial" pitchFamily="34" charset="-120"/>
               </a:rPr>
-              <a:t>ب</a:t>
+              <a:t>ح</a:t>
             </a:r>
             <a:endParaRPr lang="ar-SA" sz="6600" dirty="0"/>
           </a:p>
@@ -9769,7 +9769,7 @@
                 <a:ea typeface="Arial" pitchFamily="34" charset="-122"/>
                 <a:cs typeface="Arial" pitchFamily="34" charset="-120"/>
               </a:rPr>
-              <a:t>بًا</a:t>
+              <a:t>حًا</a:t>
             </a:r>
             <a:endParaRPr lang="ar-SA" sz="6600" dirty="0"/>
           </a:p>
@@ -9808,7 +9808,7 @@
                 <a:ea typeface="Arial" pitchFamily="34" charset="-122"/>
                 <a:cs typeface="Arial" pitchFamily="34" charset="-120"/>
               </a:rPr>
-              <a:t>جَأَبًا</a:t>
+              <a:t>جَأَحًا</a:t>
             </a:r>
             <a:endParaRPr lang="ar-SA" sz="7200" dirty="0"/>
           </a:p>
@@ -11224,7 +11224,7 @@
                 <a:ea typeface="Arial" pitchFamily="34" charset="-122"/>
                 <a:cs typeface="Arial" pitchFamily="34" charset="-120"/>
               </a:rPr>
-              <a:t>ب</a:t>
+              <a:t>خ</a:t>
             </a:r>
             <a:endParaRPr lang="ar-SA" sz="6600" dirty="0"/>
           </a:p>
@@ -11263,7 +11263,7 @@
                 <a:ea typeface="Arial" pitchFamily="34" charset="-122"/>
                 <a:cs typeface="Arial" pitchFamily="34" charset="-120"/>
               </a:rPr>
-              <a:t>بٍ</a:t>
+              <a:t>خٍ</a:t>
             </a:r>
             <a:endParaRPr lang="ar-SA" sz="6600" dirty="0"/>
           </a:p>
@@ -11302,7 +11302,7 @@
                 <a:ea typeface="Arial" pitchFamily="34" charset="-122"/>
                 <a:cs typeface="Arial" pitchFamily="34" charset="-120"/>
               </a:rPr>
-              <a:t>حَأَبٍ</a:t>
+              <a:t>حَأَخٍ</a:t>
             </a:r>
             <a:endParaRPr lang="ar-SA" sz="7200" dirty="0"/>
           </a:p>
@@ -12718,7 +12718,7 @@
                 <a:ea typeface="Arial" pitchFamily="34" charset="-122"/>
                 <a:cs typeface="Arial" pitchFamily="34" charset="-120"/>
               </a:rPr>
-              <a:t>ب</a:t>
+              <a:t>د</a:t>
             </a:r>
             <a:endParaRPr lang="ar-SA" sz="6600" dirty="0"/>
           </a:p>
@@ -12757,7 +12757,7 @@
                 <a:ea typeface="Arial" pitchFamily="34" charset="-122"/>
                 <a:cs typeface="Arial" pitchFamily="34" charset="-120"/>
               </a:rPr>
-              <a:t>بٌ</a:t>
+              <a:t>دٌ</a:t>
             </a:r>
             <a:endParaRPr lang="ar-SA" sz="6600" dirty="0"/>
           </a:p>
@@ -12796,7 +12796,7 @@
                 <a:ea typeface="Arial" pitchFamily="34" charset="-122"/>
                 <a:cs typeface="Arial" pitchFamily="34" charset="-120"/>
               </a:rPr>
-              <a:t>خَأَبٌ</a:t>
+              <a:t>خَأَدٌ</a:t>
             </a:r>
             <a:endParaRPr lang="ar-SA" sz="7200" dirty="0"/>
           </a:p>
@@ -14056,7 +14056,7 @@
                 <a:ea typeface="Arial" pitchFamily="34" charset="-122"/>
                 <a:cs typeface="Arial" pitchFamily="34" charset="-120"/>
               </a:rPr>
-              <a:t>ب</a:t>
+              <a:t>د</a:t>
             </a:r>
             <a:endParaRPr lang="ar-SA" sz="6600" dirty="0"/>
           </a:p>
@@ -14095,7 +14095,7 @@
                 <a:ea typeface="Arial" pitchFamily="34" charset="-122"/>
                 <a:cs typeface="Arial" pitchFamily="34" charset="-120"/>
               </a:rPr>
-              <a:t>بَ</a:t>
+              <a:t>دَ</a:t>
             </a:r>
             <a:endParaRPr lang="ar-SA" sz="6600" dirty="0"/>
           </a:p>
@@ -14212,7 +14212,7 @@
                 <a:ea typeface="Arial" pitchFamily="34" charset="-122"/>
                 <a:cs typeface="Arial" pitchFamily="34" charset="-120"/>
               </a:rPr>
-              <a:t>س</a:t>
+              <a:t>ب</a:t>
             </a:r>
             <a:endParaRPr lang="ar-SA" sz="6600" dirty="0"/>
           </a:p>
@@ -14251,7 +14251,7 @@
                 <a:ea typeface="Arial" pitchFamily="34" charset="-122"/>
                 <a:cs typeface="Arial" pitchFamily="34" charset="-120"/>
               </a:rPr>
-              <a:t>سًا</a:t>
+              <a:t>بًا</a:t>
             </a:r>
             <a:endParaRPr lang="ar-SA" sz="6600" dirty="0"/>
           </a:p>
@@ -14290,7 +14290,7 @@
                 <a:ea typeface="Arial" pitchFamily="34" charset="-122"/>
                 <a:cs typeface="Arial" pitchFamily="34" charset="-120"/>
               </a:rPr>
-              <a:t>بَأَسًا</a:t>
+              <a:t>دَأَبًا</a:t>
             </a:r>
             <a:endParaRPr lang="ar-SA" sz="7200" dirty="0"/>
           </a:p>
@@ -15500,7 +15500,7 @@
                 <a:ea typeface="Arial" pitchFamily="34" charset="-122"/>
                 <a:cs typeface="Arial" pitchFamily="34" charset="-120"/>
               </a:rPr>
-              <a:t>س</a:t>
+              <a:t>ب</a:t>
             </a:r>
             <a:endParaRPr lang="ar-SA" sz="9000" dirty="0"/>
           </a:p>
@@ -15539,7 +15539,7 @@
                 <a:ea typeface="Arial" pitchFamily="34" charset="-122"/>
                 <a:cs typeface="Arial" pitchFamily="34" charset="-120"/>
               </a:rPr>
-              <a:t>سَ</a:t>
+              <a:t>بَ</a:t>
             </a:r>
             <a:endParaRPr lang="ar-SA" sz="9000" dirty="0"/>
           </a:p>
@@ -15656,7 +15656,7 @@
                 <a:ea typeface="Arial" pitchFamily="34" charset="-122"/>
                 <a:cs typeface="Arial" pitchFamily="34" charset="-120"/>
               </a:rPr>
-              <a:t>سَأً</a:t>
+              <a:t>بَأً</a:t>
             </a:r>
             <a:endParaRPr lang="ar-SA" sz="9600" dirty="0"/>
           </a:p>
@@ -16647,7 +16647,7 @@
                 <a:ea typeface="Arial" pitchFamily="34" charset="-122"/>
                 <a:cs typeface="Arial" pitchFamily="34" charset="-120"/>
               </a:rPr>
-              <a:t>ب</a:t>
+              <a:t>ت</a:t>
             </a:r>
             <a:endParaRPr lang="ar-SA" sz="9000" dirty="0"/>
           </a:p>
@@ -16686,7 +16686,7 @@
                 <a:ea typeface="Arial" pitchFamily="34" charset="-122"/>
                 <a:cs typeface="Arial" pitchFamily="34" charset="-120"/>
               </a:rPr>
-              <a:t>بَ</a:t>
+              <a:t>تَ</a:t>
             </a:r>
             <a:endParaRPr lang="ar-SA" sz="9000" dirty="0"/>
           </a:p>
@@ -16803,7 +16803,7 @@
                 <a:ea typeface="Arial" pitchFamily="34" charset="-122"/>
                 <a:cs typeface="Arial" pitchFamily="34" charset="-120"/>
               </a:rPr>
-              <a:t>بَأٍ</a:t>
+              <a:t>تَأٍ</a:t>
             </a:r>
             <a:endParaRPr lang="ar-SA" sz="9600" dirty="0"/>
           </a:p>
@@ -18357,7 +18357,7 @@
                 <a:ea typeface="Arial" pitchFamily="34" charset="-122"/>
                 <a:cs typeface="Arial" pitchFamily="34" charset="-120"/>
               </a:rPr>
-              <a:t>ت</a:t>
+              <a:t>ث</a:t>
             </a:r>
             <a:endParaRPr lang="ar-SA" sz="9000" dirty="0"/>
           </a:p>
@@ -18396,7 +18396,7 @@
                 <a:ea typeface="Arial" pitchFamily="34" charset="-122"/>
                 <a:cs typeface="Arial" pitchFamily="34" charset="-120"/>
               </a:rPr>
-              <a:t>تَ</a:t>
+              <a:t>ثَ</a:t>
             </a:r>
             <a:endParaRPr lang="ar-SA" sz="9000" dirty="0"/>
           </a:p>
@@ -18513,7 +18513,7 @@
                 <a:ea typeface="Arial" pitchFamily="34" charset="-122"/>
                 <a:cs typeface="Arial" pitchFamily="34" charset="-120"/>
               </a:rPr>
-              <a:t>تَأٌ</a:t>
+              <a:t>ثَأٌ</a:t>
             </a:r>
             <a:endParaRPr lang="ar-SA" sz="9600" dirty="0"/>
           </a:p>
@@ -19504,7 +19504,7 @@
                 <a:ea typeface="Arial" pitchFamily="34" charset="-122"/>
                 <a:cs typeface="Arial" pitchFamily="34" charset="-120"/>
               </a:rPr>
-              <a:t>ث</a:t>
+              <a:t>ج</a:t>
             </a:r>
             <a:endParaRPr lang="ar-SA" sz="9000" dirty="0"/>
           </a:p>
@@ -19543,7 +19543,7 @@
                 <a:ea typeface="Arial" pitchFamily="34" charset="-122"/>
                 <a:cs typeface="Arial" pitchFamily="34" charset="-120"/>
               </a:rPr>
-              <a:t>ثَ</a:t>
+              <a:t>جَ</a:t>
             </a:r>
             <a:endParaRPr lang="ar-SA" sz="9000" dirty="0"/>
           </a:p>
@@ -19660,7 +19660,7 @@
                 <a:ea typeface="Arial" pitchFamily="34" charset="-122"/>
                 <a:cs typeface="Arial" pitchFamily="34" charset="-120"/>
               </a:rPr>
-              <a:t>ثَأً</a:t>
+              <a:t>جَأً</a:t>
             </a:r>
             <a:endParaRPr lang="ar-SA" sz="9600" dirty="0"/>
           </a:p>
@@ -20651,7 +20651,7 @@
                 <a:ea typeface="Arial" pitchFamily="34" charset="-122"/>
                 <a:cs typeface="Arial" pitchFamily="34" charset="-120"/>
               </a:rPr>
-              <a:t>ج</a:t>
+              <a:t>ح</a:t>
             </a:r>
             <a:endParaRPr lang="ar-SA" sz="9000" dirty="0"/>
           </a:p>
@@ -20690,7 +20690,7 @@
                 <a:ea typeface="Arial" pitchFamily="34" charset="-122"/>
                 <a:cs typeface="Arial" pitchFamily="34" charset="-120"/>
               </a:rPr>
-              <a:t>جَ</a:t>
+              <a:t>حَ</a:t>
             </a:r>
             <a:endParaRPr lang="ar-SA" sz="9000" dirty="0"/>
           </a:p>
@@ -20807,7 +20807,7 @@
                 <a:ea typeface="Arial" pitchFamily="34" charset="-122"/>
                 <a:cs typeface="Arial" pitchFamily="34" charset="-120"/>
               </a:rPr>
-              <a:t>جَأٍ</a:t>
+              <a:t>حَأٍ</a:t>
             </a:r>
             <a:endParaRPr lang="ar-SA" sz="9600" dirty="0"/>
           </a:p>
@@ -21798,7 +21798,7 @@
                 <a:ea typeface="Arial" pitchFamily="34" charset="-122"/>
                 <a:cs typeface="Arial" pitchFamily="34" charset="-120"/>
               </a:rPr>
-              <a:t>ح</a:t>
+              <a:t>خ</a:t>
             </a:r>
             <a:endParaRPr lang="ar-SA" sz="9000" dirty="0"/>
           </a:p>
@@ -21837,7 +21837,7 @@
                 <a:ea typeface="Arial" pitchFamily="34" charset="-122"/>
                 <a:cs typeface="Arial" pitchFamily="34" charset="-120"/>
               </a:rPr>
-              <a:t>حَ</a:t>
+              <a:t>خَ</a:t>
             </a:r>
             <a:endParaRPr lang="ar-SA" sz="9000" dirty="0"/>
           </a:p>
@@ -21954,7 +21954,7 @@
                 <a:ea typeface="Arial" pitchFamily="34" charset="-122"/>
                 <a:cs typeface="Arial" pitchFamily="34" charset="-120"/>
               </a:rPr>
-              <a:t>حَأٌ</a:t>
+              <a:t>خَأٌ</a:t>
             </a:r>
             <a:endParaRPr lang="ar-SA" sz="9600" dirty="0"/>
           </a:p>
@@ -22945,7 +22945,7 @@
                 <a:ea typeface="Arial" pitchFamily="34" charset="-122"/>
                 <a:cs typeface="Arial" pitchFamily="34" charset="-120"/>
               </a:rPr>
-              <a:t>خ</a:t>
+              <a:t>د</a:t>
             </a:r>
             <a:endParaRPr lang="ar-SA" sz="9000" dirty="0"/>
           </a:p>
@@ -22984,7 +22984,7 @@
                 <a:ea typeface="Arial" pitchFamily="34" charset="-122"/>
                 <a:cs typeface="Arial" pitchFamily="34" charset="-120"/>
               </a:rPr>
-              <a:t>خَ</a:t>
+              <a:t>دَ</a:t>
             </a:r>
             <a:endParaRPr lang="ar-SA" sz="9000" dirty="0"/>
           </a:p>
@@ -23101,7 +23101,7 @@
                 <a:ea typeface="Arial" pitchFamily="34" charset="-122"/>
                 <a:cs typeface="Arial" pitchFamily="34" charset="-120"/>
               </a:rPr>
-              <a:t>خَأً</a:t>
+              <a:t>دَأً</a:t>
             </a:r>
             <a:endParaRPr lang="ar-SA" sz="9600" dirty="0"/>
           </a:p>
@@ -24733,7 +24733,7 @@
                 <a:ea typeface="Arial" pitchFamily="34" charset="-122"/>
                 <a:cs typeface="Arial" pitchFamily="34" charset="-120"/>
               </a:rPr>
-              <a:t>س</a:t>
+              <a:t>ب</a:t>
             </a:r>
             <a:endParaRPr lang="ar-SA" sz="9000" dirty="0"/>
           </a:p>
@@ -24772,7 +24772,7 @@
                 <a:ea typeface="Arial" pitchFamily="34" charset="-122"/>
                 <a:cs typeface="Arial" pitchFamily="34" charset="-120"/>
               </a:rPr>
-              <a:t>سًا</a:t>
+              <a:t>بًا</a:t>
             </a:r>
             <a:endParaRPr lang="ar-SA" sz="9000" dirty="0"/>
           </a:p>
@@ -24811,7 +24811,7 @@
                 <a:ea typeface="Arial" pitchFamily="34" charset="-122"/>
                 <a:cs typeface="Arial" pitchFamily="34" charset="-120"/>
               </a:rPr>
-              <a:t>أَسًا</a:t>
+              <a:t>أَبًا</a:t>
             </a:r>
             <a:endParaRPr lang="ar-SA" sz="9600" dirty="0"/>
           </a:p>
@@ -25880,7 +25880,7 @@
                 <a:ea typeface="Arial" pitchFamily="34" charset="-122"/>
                 <a:cs typeface="Arial" pitchFamily="34" charset="-120"/>
               </a:rPr>
-              <a:t>ب</a:t>
+              <a:t>ت</a:t>
             </a:r>
             <a:endParaRPr lang="ar-SA" sz="9000" dirty="0"/>
           </a:p>
@@ -25919,7 +25919,7 @@
                 <a:ea typeface="Arial" pitchFamily="34" charset="-122"/>
                 <a:cs typeface="Arial" pitchFamily="34" charset="-120"/>
               </a:rPr>
-              <a:t>بٍ</a:t>
+              <a:t>تٍ</a:t>
             </a:r>
             <a:endParaRPr lang="ar-SA" sz="9000" dirty="0"/>
           </a:p>
@@ -25958,7 +25958,7 @@
                 <a:ea typeface="Arial" pitchFamily="34" charset="-122"/>
                 <a:cs typeface="Arial" pitchFamily="34" charset="-120"/>
               </a:rPr>
-              <a:t>أَبٍ</a:t>
+              <a:t>أَتٍ</a:t>
             </a:r>
             <a:endParaRPr lang="ar-SA" sz="9600" dirty="0"/>
           </a:p>
@@ -27027,7 +27027,7 @@
                 <a:ea typeface="Arial" pitchFamily="34" charset="-122"/>
                 <a:cs typeface="Arial" pitchFamily="34" charset="-120"/>
               </a:rPr>
-              <a:t>ت</a:t>
+              <a:t>ث</a:t>
             </a:r>
             <a:endParaRPr lang="ar-SA" sz="9000" dirty="0"/>
           </a:p>
@@ -27066,7 +27066,7 @@
                 <a:ea typeface="Arial" pitchFamily="34" charset="-122"/>
                 <a:cs typeface="Arial" pitchFamily="34" charset="-120"/>
               </a:rPr>
-              <a:t>تٌ</a:t>
+              <a:t>ثٌ</a:t>
             </a:r>
             <a:endParaRPr lang="ar-SA" sz="9000" dirty="0"/>
           </a:p>
@@ -27105,7 +27105,7 @@
                 <a:ea typeface="Arial" pitchFamily="34" charset="-122"/>
                 <a:cs typeface="Arial" pitchFamily="34" charset="-120"/>
               </a:rPr>
-              <a:t>أَتٌ</a:t>
+              <a:t>أَثٌ</a:t>
             </a:r>
             <a:endParaRPr lang="ar-SA" sz="9600" dirty="0"/>
           </a:p>
@@ -28174,7 +28174,7 @@
                 <a:ea typeface="Arial" pitchFamily="34" charset="-122"/>
                 <a:cs typeface="Arial" pitchFamily="34" charset="-120"/>
               </a:rPr>
-              <a:t>ث</a:t>
+              <a:t>ج</a:t>
             </a:r>
             <a:endParaRPr lang="ar-SA" sz="9000" dirty="0"/>
           </a:p>
@@ -28213,7 +28213,7 @@
                 <a:ea typeface="Arial" pitchFamily="34" charset="-122"/>
                 <a:cs typeface="Arial" pitchFamily="34" charset="-120"/>
               </a:rPr>
-              <a:t>ثًا</a:t>
+              <a:t>جًا</a:t>
             </a:r>
             <a:endParaRPr lang="ar-SA" sz="9000" dirty="0"/>
           </a:p>
@@ -28252,7 +28252,7 @@
                 <a:ea typeface="Arial" pitchFamily="34" charset="-122"/>
                 <a:cs typeface="Arial" pitchFamily="34" charset="-120"/>
               </a:rPr>
-              <a:t>أَثًا</a:t>
+              <a:t>أَجًا</a:t>
             </a:r>
             <a:endParaRPr lang="ar-SA" sz="9600" dirty="0"/>
           </a:p>
@@ -29321,7 +29321,7 @@
                 <a:ea typeface="Arial" pitchFamily="34" charset="-122"/>
                 <a:cs typeface="Arial" pitchFamily="34" charset="-120"/>
               </a:rPr>
-              <a:t>ج</a:t>
+              <a:t>ح</a:t>
             </a:r>
             <a:endParaRPr lang="ar-SA" sz="9000" dirty="0"/>
           </a:p>
@@ -29360,7 +29360,7 @@
                 <a:ea typeface="Arial" pitchFamily="34" charset="-122"/>
                 <a:cs typeface="Arial" pitchFamily="34" charset="-120"/>
               </a:rPr>
-              <a:t>جٍ</a:t>
+              <a:t>حٍ</a:t>
             </a:r>
             <a:endParaRPr lang="ar-SA" sz="9000" dirty="0"/>
           </a:p>
@@ -29399,7 +29399,7 @@
                 <a:ea typeface="Arial" pitchFamily="34" charset="-122"/>
                 <a:cs typeface="Arial" pitchFamily="34" charset="-120"/>
               </a:rPr>
-              <a:t>أَجٍ</a:t>
+              <a:t>أَحٍ</a:t>
             </a:r>
             <a:endParaRPr lang="ar-SA" sz="9600" dirty="0"/>
           </a:p>
@@ -30468,7 +30468,7 @@
                 <a:ea typeface="Arial" pitchFamily="34" charset="-122"/>
                 <a:cs typeface="Arial" pitchFamily="34" charset="-120"/>
               </a:rPr>
-              <a:t>ح</a:t>
+              <a:t>خ</a:t>
             </a:r>
             <a:endParaRPr lang="ar-SA" sz="9000" dirty="0"/>
           </a:p>
@@ -30507,7 +30507,7 @@
                 <a:ea typeface="Arial" pitchFamily="34" charset="-122"/>
                 <a:cs typeface="Arial" pitchFamily="34" charset="-120"/>
               </a:rPr>
-              <a:t>حٌ</a:t>
+              <a:t>خٌ</a:t>
             </a:r>
             <a:endParaRPr lang="ar-SA" sz="9000" dirty="0"/>
           </a:p>
@@ -30546,7 +30546,7 @@
                 <a:ea typeface="Arial" pitchFamily="34" charset="-122"/>
                 <a:cs typeface="Arial" pitchFamily="34" charset="-120"/>
               </a:rPr>
-              <a:t>أَحٌ</a:t>
+              <a:t>أَخٌ</a:t>
             </a:r>
             <a:endParaRPr lang="ar-SA" sz="9600" dirty="0"/>
           </a:p>
